--- a/MCP_Praesentation.pptx  -  Repariert.pptx
+++ b/MCP_Praesentation.pptx  -  Repariert.pptx
@@ -13374,6 +13374,42 @@
               <a:t>4</a:t>
             </a:r>
             <a:endParaRPr lang="en-US" sz="900" dirty="0"/>
+          </a:p>
+        </p:txBody>
+      </p:sp>
+      <p:sp>
+        <p:nvSpPr>
+          <p:cNvPr id="23" name="Shape 10">
+            <a:extLst>
+              <a:ext uri="{FF2B5EF4-FFF2-40B4-BE49-F238E27FC236}">
+                <a16:creationId xmlns:a16="http://schemas.microsoft.com/office/drawing/2014/main" id="{708F5D4E-CEF1-07B1-0529-9C6009D1629D}"/>
+              </a:ext>
+            </a:extLst>
+          </p:cNvPr>
+          <p:cNvSpPr/>
+          <p:nvPr/>
+        </p:nvSpPr>
+        <p:spPr>
+          <a:xfrm flipV="1">
+            <a:off x="7589520" y="2496312"/>
+            <a:ext cx="1417320" cy="1069848"/>
+          </a:xfrm>
+          <a:prstGeom prst="line">
+            <a:avLst/>
+          </a:prstGeom>
+          <a:noFill/>
+          <a:ln w="31750">
+            <a:solidFill>
+              <a:srgbClr val="0D9488"/>
+            </a:solidFill>
+            <a:prstDash val="solid"/>
+          </a:ln>
+        </p:spPr>
+        <p:txBody>
+          <a:bodyPr/>
+          <a:lstStyle/>
+          <a:p>
+            <a:endParaRPr lang="de-AT"/>
           </a:p>
         </p:txBody>
       </p:sp>
